--- a/Lectures/py_lec_12.pptx
+++ b/Lectures/py_lec_12.pptx
@@ -9505,17 +9505,7 @@
                     <a:latin typeface="+mn-lt"/>
                     <a:cs typeface="Times New Roman" panose="02020603050405020304" pitchFamily="18" charset="0"/>
                   </a:rPr>
-                  <a:t>Name: </a:t>
-                </a:r>
-                <a:r>
-                  <a:rPr lang="en-US" sz="900" dirty="0" err="1">
-                    <a:solidFill>
-                      <a:schemeClr val="tx1"/>
-                    </a:solidFill>
-                    <a:latin typeface="+mn-lt"/>
-                    <a:cs typeface="Times New Roman" panose="02020603050405020304" pitchFamily="18" charset="0"/>
-                  </a:rPr>
-                  <a:t>WoT</a:t>
+                  <a:t>Name: WoT</a:t>
                 </a:r>
                 <a:endParaRPr lang="ru-RU" sz="900" dirty="0">
                   <a:solidFill>
@@ -9659,16 +9649,6 @@
             <a:lstStyle/>
             <a:p>
               <a:r>
-                <a:rPr lang="en-US" sz="900" dirty="0" err="1">
-                  <a:solidFill>
-                    <a:schemeClr val="tx1"/>
-                  </a:solidFill>
-                  <a:latin typeface="+mn-lt"/>
-                  <a:cs typeface="Times New Roman" panose="02020603050405020304" pitchFamily="18" charset="0"/>
-                </a:rPr>
-                <a:t>link_id</a:t>
-              </a:r>
-              <a:r>
                 <a:rPr lang="en-US" sz="900" dirty="0">
                   <a:solidFill>
                     <a:schemeClr val="tx1"/>
@@ -9676,7 +9656,7 @@
                   <a:latin typeface="+mn-lt"/>
                   <a:cs typeface="Times New Roman" panose="02020603050405020304" pitchFamily="18" charset="0"/>
                 </a:rPr>
-                <a:t>: 101</a:t>
+                <a:t>link_id: 101</a:t>
               </a:r>
             </a:p>
             <a:p>
@@ -9906,16 +9886,6 @@
             <a:lstStyle/>
             <a:p>
               <a:r>
-                <a:rPr lang="en-US" sz="900" dirty="0" err="1">
-                  <a:solidFill>
-                    <a:schemeClr val="tx1"/>
-                  </a:solidFill>
-                  <a:latin typeface="+mn-lt"/>
-                  <a:cs typeface="Times New Roman" panose="02020603050405020304" pitchFamily="18" charset="0"/>
-                </a:rPr>
-                <a:t>link_id</a:t>
-              </a:r>
-              <a:r>
                 <a:rPr lang="en-US" sz="900" dirty="0">
                   <a:solidFill>
                     <a:schemeClr val="tx1"/>
@@ -9923,7 +9893,7 @@
                   <a:latin typeface="+mn-lt"/>
                   <a:cs typeface="Times New Roman" panose="02020603050405020304" pitchFamily="18" charset="0"/>
                 </a:rPr>
-                <a:t>: 105</a:t>
+                <a:t>link_id: 105</a:t>
               </a:r>
             </a:p>
             <a:p>
@@ -9976,16 +9946,6 @@
             <a:lstStyle/>
             <a:p>
               <a:r>
-                <a:rPr lang="en-US" sz="900" dirty="0" err="1">
-                  <a:solidFill>
-                    <a:schemeClr val="tx1"/>
-                  </a:solidFill>
-                  <a:latin typeface="+mn-lt"/>
-                  <a:cs typeface="Times New Roman" panose="02020603050405020304" pitchFamily="18" charset="0"/>
-                </a:rPr>
-                <a:t>link_id</a:t>
-              </a:r>
-              <a:r>
                 <a:rPr lang="en-US" sz="900" dirty="0">
                   <a:solidFill>
                     <a:schemeClr val="tx1"/>
@@ -9993,7 +9953,7 @@
                   <a:latin typeface="+mn-lt"/>
                   <a:cs typeface="Times New Roman" panose="02020603050405020304" pitchFamily="18" charset="0"/>
                 </a:rPr>
-                <a:t>: 102</a:t>
+                <a:t>link_id: 102</a:t>
               </a:r>
             </a:p>
             <a:p>
@@ -10005,17 +9965,7 @@
                   <a:latin typeface="+mn-lt"/>
                   <a:cs typeface="Times New Roman" panose="02020603050405020304" pitchFamily="18" charset="0"/>
                 </a:rPr>
-                <a:t>label: </a:t>
-              </a:r>
-              <a:r>
-                <a:rPr lang="en-US" sz="900" dirty="0" err="1">
-                  <a:solidFill>
-                    <a:schemeClr val="tx1"/>
-                  </a:solidFill>
-                  <a:latin typeface="+mn-lt"/>
-                  <a:cs typeface="Times New Roman" panose="02020603050405020304" pitchFamily="18" charset="0"/>
-                </a:rPr>
-                <a:t>is_member</a:t>
+                <a:t>label: is_member</a:t>
               </a:r>
               <a:endParaRPr lang="ru-RU" sz="900" dirty="0">
                 <a:solidFill>
@@ -10137,16 +10087,6 @@
             <a:lstStyle/>
             <a:p>
               <a:r>
-                <a:rPr lang="en-US" sz="900" dirty="0" err="1">
-                  <a:solidFill>
-                    <a:schemeClr val="tx1"/>
-                  </a:solidFill>
-                  <a:latin typeface="+mn-lt"/>
-                  <a:cs typeface="Times New Roman" panose="02020603050405020304" pitchFamily="18" charset="0"/>
-                </a:rPr>
-                <a:t>link_id</a:t>
-              </a:r>
-              <a:r>
                 <a:rPr lang="en-US" sz="900" dirty="0">
                   <a:solidFill>
                     <a:schemeClr val="tx1"/>
@@ -10154,7 +10094,7 @@
                   <a:latin typeface="+mn-lt"/>
                   <a:cs typeface="Times New Roman" panose="02020603050405020304" pitchFamily="18" charset="0"/>
                 </a:rPr>
-                <a:t>: 103</a:t>
+                <a:t>link_id: 103</a:t>
               </a:r>
             </a:p>
             <a:p>
@@ -33473,22 +33413,13 @@
           <a:lstStyle/>
           <a:p>
             <a:r>
-              <a:rPr lang="en-US" sz="3600" kern="1200" dirty="0" err="1">
+              <a:rPr lang="en-US" sz="3600" kern="1200" dirty="0">
                 <a:solidFill>
                   <a:schemeClr val="bg1"/>
                 </a:solidFill>
                 <a:latin typeface="+mj-lt"/>
               </a:rPr>
-              <a:t>redis</a:t>
-            </a:r>
-            <a:r>
-              <a:rPr lang="en-US" sz="3600" kern="1200" dirty="0">
-                <a:solidFill>
-                  <a:schemeClr val="bg1"/>
-                </a:solidFill>
-                <a:latin typeface="+mj-lt"/>
-              </a:rPr>
-              <a:t>: </a:t>
+              <a:t>redis: </a:t>
             </a:r>
             <a:r>
               <a:rPr lang="ru-RU" sz="3600" kern="1200" dirty="0">
@@ -36366,22 +36297,13 @@
           <a:lstStyle/>
           <a:p>
             <a:r>
-              <a:rPr lang="en-US" sz="3600" kern="1200" dirty="0" err="1">
+              <a:rPr lang="en-US" sz="3600" kern="1200" dirty="0">
                 <a:solidFill>
                   <a:schemeClr val="bg1"/>
                 </a:solidFill>
                 <a:latin typeface="+mj-lt"/>
               </a:rPr>
-              <a:t>redis</a:t>
-            </a:r>
-            <a:r>
-              <a:rPr lang="en-US" sz="3600" kern="1200" dirty="0">
-                <a:solidFill>
-                  <a:schemeClr val="bg1"/>
-                </a:solidFill>
-                <a:latin typeface="+mj-lt"/>
-              </a:rPr>
-              <a:t>: </a:t>
+              <a:t>redis: </a:t>
             </a:r>
             <a:r>
               <a:rPr lang="ru-RU" sz="3600" kern="1200" dirty="0">
